--- a/Churn Analysis Portfolio.pptx
+++ b/Churn Analysis Portfolio.pptx
@@ -2480,9 +2480,6 @@
           <a:bodyPr wrap="square" lIns="0" tIns="0" rIns="0" bIns="0" rtlCol="0" anchor="ctr"/>
           <a:lstStyle/>
           <a:p>
-            <a:pPr marL="0" indent="0">
-              <a:buNone/>
-            </a:pPr>
             <a:r>
               <a:rPr lang="en-US" sz="1200" dirty="0">
                 <a:solidFill>
@@ -2492,7 +2489,7 @@
                 <a:ea typeface="Calibri" pitchFamily="34" charset="-122"/>
                 <a:cs typeface="Calibri" pitchFamily="34" charset="-120"/>
               </a:rPr>
-              <a:t>GitHub: [add repo link]   ·   Email: [add email]</a:t>
+              <a:t>GitHub: https://github.com/TusharVaidya2410   ·   Email: 24je0471@iitism.ac.in</a:t>
             </a:r>
             <a:endParaRPr lang="en-US" sz="1200" dirty="0"/>
           </a:p>
